--- a/specs/02-screens/_mockups/브리핑.pptx
+++ b/specs/02-screens/_mockups/브리핑.pptx
@@ -3208,7 +3208,7 @@
             <a:r>
               <a:rPr sz="1100" b="1">
                 <a:solidFill>
-                  <a:srgbClr val="1A4FC0"/>
+                  <a:srgbClr val="1E5AF0"/>
                 </a:solidFill>
                 <a:latin typeface="Malgun Gothic"/>
               </a:rPr>
@@ -3243,7 +3243,7 @@
             <a:r>
               <a:rPr sz="4000" b="1">
                 <a:solidFill>
-                  <a:srgbClr val="1C2430"/>
+                  <a:srgbClr val="0F1A2E"/>
                 </a:solidFill>
                 <a:latin typeface="Malgun Gothic"/>
               </a:rPr>
@@ -3278,7 +3278,7 @@
             <a:r>
               <a:rPr sz="1600" b="0">
                 <a:solidFill>
-                  <a:srgbClr val="6B7684"/>
+                  <a:srgbClr val="3A4657"/>
                 </a:solidFill>
                 <a:latin typeface="Malgun Gothic"/>
               </a:rPr>
@@ -3322,7 +3322,7 @@
             <a:r>
               <a:rPr sz="1300" b="1">
                 <a:solidFill>
-                  <a:srgbClr val="1C2430"/>
+                  <a:srgbClr val="0F1A2E"/>
                 </a:solidFill>
                 <a:latin typeface="Malgun Gothic"/>
               </a:rPr>
@@ -3356,7 +3356,7 @@
             <a:avLst/>
           </a:prstGeom>
           <a:solidFill>
-            <a:srgbClr val="E6EAEF"/>
+            <a:srgbClr val="E3E8F0"/>
           </a:solidFill>
           <a:ln>
             <a:noFill/>
@@ -3578,7 +3578,7 @@
             <a:r>
               <a:rPr sz="1300" b="1">
                 <a:solidFill>
-                  <a:srgbClr val="1C2430"/>
+                  <a:srgbClr val="0F1A2E"/>
                 </a:solidFill>
                 <a:latin typeface="Malgun Gothic"/>
               </a:rPr>
@@ -3587,7 +3587,7 @@
             <a:r>
               <a:rPr sz="950" b="0">
                 <a:solidFill>
-                  <a:srgbClr val="6B7684"/>
+                  <a:srgbClr val="3A4657"/>
                 </a:solidFill>
                 <a:latin typeface="Malgun Gothic"/>
               </a:rPr>
@@ -3622,7 +3622,7 @@
             <a:r>
               <a:rPr sz="950" b="0">
                 <a:solidFill>
-                  <a:srgbClr val="6B7684"/>
+                  <a:srgbClr val="3A4657"/>
                 </a:solidFill>
                 <a:latin typeface="Malgun Gothic"/>
               </a:rPr>
@@ -3646,7 +3646,7 @@
             <a:avLst/>
           </a:prstGeom>
           <a:solidFill>
-            <a:srgbClr val="E6EAEF"/>
+            <a:srgbClr val="E3E8F0"/>
           </a:solidFill>
           <a:ln>
             <a:noFill/>
@@ -3701,7 +3701,7 @@
             <a:r>
               <a:rPr sz="1200" b="1">
                 <a:solidFill>
-                  <a:srgbClr val="1A4FC0"/>
+                  <a:srgbClr val="1E5AF0"/>
                 </a:solidFill>
                 <a:latin typeface="Malgun Gothic"/>
               </a:rPr>
@@ -3736,7 +3736,7 @@
             <a:r>
               <a:rPr sz="2200" b="1">
                 <a:solidFill>
-                  <a:srgbClr val="1C2430"/>
+                  <a:srgbClr val="0F1A2E"/>
                 </a:solidFill>
                 <a:latin typeface="Malgun Gothic"/>
               </a:rPr>
@@ -3777,7 +3777,7 @@
                       <a:r>
                         <a:rPr sz="1200" b="0">
                           <a:solidFill>
-                            <a:srgbClr val="6B7684"/>
+                            <a:srgbClr val="3A4657"/>
                           </a:solidFill>
                           <a:latin typeface="Malgun Gothic"/>
                         </a:rPr>
@@ -3800,7 +3800,7 @@
                       <a:r>
                         <a:rPr sz="1200" b="1">
                           <a:solidFill>
-                            <a:srgbClr val="1C2430"/>
+                            <a:srgbClr val="0F1A2E"/>
                           </a:solidFill>
                           <a:latin typeface="Malgun Gothic"/>
                         </a:rPr>
@@ -3825,7 +3825,7 @@
                       <a:r>
                         <a:rPr sz="1200" b="0">
                           <a:solidFill>
-                            <a:srgbClr val="6B7684"/>
+                            <a:srgbClr val="3A4657"/>
                           </a:solidFill>
                           <a:latin typeface="Malgun Gothic"/>
                         </a:rPr>
@@ -3848,7 +3848,7 @@
                       <a:r>
                         <a:rPr sz="1200" b="1">
                           <a:solidFill>
-                            <a:srgbClr val="1C2430"/>
+                            <a:srgbClr val="0F1A2E"/>
                           </a:solidFill>
                           <a:latin typeface="Malgun Gothic"/>
                         </a:rPr>
@@ -3873,7 +3873,7 @@
                       <a:r>
                         <a:rPr sz="1200" b="0">
                           <a:solidFill>
-                            <a:srgbClr val="6B7684"/>
+                            <a:srgbClr val="3A4657"/>
                           </a:solidFill>
                           <a:latin typeface="Malgun Gothic"/>
                         </a:rPr>
@@ -3896,7 +3896,7 @@
                       <a:r>
                         <a:rPr sz="1200" b="1">
                           <a:solidFill>
-                            <a:srgbClr val="1C2430"/>
+                            <a:srgbClr val="0F1A2E"/>
                           </a:solidFill>
                           <a:latin typeface="Malgun Gothic"/>
                         </a:rPr>
@@ -3921,7 +3921,7 @@
                       <a:r>
                         <a:rPr sz="1200" b="0">
                           <a:solidFill>
-                            <a:srgbClr val="6B7684"/>
+                            <a:srgbClr val="3A4657"/>
                           </a:solidFill>
                           <a:latin typeface="Malgun Gothic"/>
                         </a:rPr>
@@ -3944,7 +3944,7 @@
                       <a:r>
                         <a:rPr sz="1200" b="1">
                           <a:solidFill>
-                            <a:srgbClr val="1C2430"/>
+                            <a:srgbClr val="0F1A2E"/>
                           </a:solidFill>
                           <a:latin typeface="Malgun Gothic"/>
                         </a:rPr>
@@ -3969,7 +3969,7 @@
                       <a:r>
                         <a:rPr sz="1200" b="0">
                           <a:solidFill>
-                            <a:srgbClr val="6B7684"/>
+                            <a:srgbClr val="3A4657"/>
                           </a:solidFill>
                           <a:latin typeface="Malgun Gothic"/>
                         </a:rPr>
@@ -3992,7 +3992,7 @@
                       <a:r>
                         <a:rPr sz="1200" b="1">
                           <a:solidFill>
-                            <a:srgbClr val="1C2430"/>
+                            <a:srgbClr val="0F1A2E"/>
                           </a:solidFill>
                           <a:latin typeface="Malgun Gothic"/>
                         </a:rPr>
@@ -4017,7 +4017,7 @@
                       <a:r>
                         <a:rPr sz="1200" b="0">
                           <a:solidFill>
-                            <a:srgbClr val="6B7684"/>
+                            <a:srgbClr val="3A4657"/>
                           </a:solidFill>
                           <a:latin typeface="Malgun Gothic"/>
                         </a:rPr>
@@ -4040,7 +4040,7 @@
                       <a:r>
                         <a:rPr sz="1200" b="1">
                           <a:solidFill>
-                            <a:srgbClr val="1C2430"/>
+                            <a:srgbClr val="0F1A2E"/>
                           </a:solidFill>
                           <a:latin typeface="Malgun Gothic"/>
                         </a:rPr>
@@ -4065,7 +4065,7 @@
                       <a:r>
                         <a:rPr sz="1200" b="0">
                           <a:solidFill>
-                            <a:srgbClr val="6B7684"/>
+                            <a:srgbClr val="3A4657"/>
                           </a:solidFill>
                           <a:latin typeface="Malgun Gothic"/>
                         </a:rPr>
@@ -4088,7 +4088,7 @@
                       <a:r>
                         <a:rPr sz="1200" b="1">
                           <a:solidFill>
-                            <a:srgbClr val="1C2430"/>
+                            <a:srgbClr val="0F1A2E"/>
                           </a:solidFill>
                           <a:latin typeface="Malgun Gothic"/>
                         </a:rPr>
@@ -4113,7 +4113,7 @@
                       <a:r>
                         <a:rPr sz="1200" b="0">
                           <a:solidFill>
-                            <a:srgbClr val="6B7684"/>
+                            <a:srgbClr val="3A4657"/>
                           </a:solidFill>
                           <a:latin typeface="Malgun Gothic"/>
                         </a:rPr>
@@ -4136,7 +4136,7 @@
                       <a:r>
                         <a:rPr sz="1200" b="1">
                           <a:solidFill>
-                            <a:srgbClr val="1C2430"/>
+                            <a:srgbClr val="0F1A2E"/>
                           </a:solidFill>
                           <a:latin typeface="Malgun Gothic"/>
                         </a:rPr>
@@ -4161,7 +4161,7 @@
                       <a:r>
                         <a:rPr sz="1200" b="0">
                           <a:solidFill>
-                            <a:srgbClr val="6B7684"/>
+                            <a:srgbClr val="3A4657"/>
                           </a:solidFill>
                           <a:latin typeface="Malgun Gothic"/>
                         </a:rPr>
@@ -4184,7 +4184,7 @@
                       <a:r>
                         <a:rPr sz="1200" b="1">
                           <a:solidFill>
-                            <a:srgbClr val="1C2430"/>
+                            <a:srgbClr val="0F1A2E"/>
                           </a:solidFill>
                           <a:latin typeface="Malgun Gothic"/>
                         </a:rPr>
@@ -4209,7 +4209,7 @@
                       <a:r>
                         <a:rPr sz="1200" b="0">
                           <a:solidFill>
-                            <a:srgbClr val="6B7684"/>
+                            <a:srgbClr val="3A4657"/>
                           </a:solidFill>
                           <a:latin typeface="Malgun Gothic"/>
                         </a:rPr>
@@ -4232,11 +4232,11 @@
                       <a:r>
                         <a:rPr sz="1200" b="1">
                           <a:solidFill>
-                            <a:srgbClr val="1C2430"/>
+                            <a:srgbClr val="0F1A2E"/>
                           </a:solidFill>
                           <a:latin typeface="Malgun Gothic"/>
                         </a:rPr>
-                        <a:t>8억 / 2,250만</a:t>
+                        <a:t>7억 / 2,250만</a:t>
                       </a:r>
                     </a:p>
                   </a:txBody>
@@ -4270,7 +4270,7 @@
           </a:solidFill>
           <a:ln w="9525">
             <a:solidFill>
-              <a:srgbClr val="E6EAEF"/>
+              <a:srgbClr val="E3E8F0"/>
             </a:solidFill>
           </a:ln>
           <a:effectLst/>
@@ -4347,7 +4347,7 @@
             <a:avLst/>
           </a:prstGeom>
           <a:solidFill>
-            <a:srgbClr val="F7F9FC"/>
+            <a:srgbClr val="F5F8FC"/>
           </a:solidFill>
           <a:ln w="9525">
             <a:solidFill>
@@ -4404,7 +4404,7 @@
             <a:r>
               <a:rPr sz="1050" b="0">
                 <a:solidFill>
-                  <a:srgbClr val="6B7684"/>
+                  <a:srgbClr val="3A4657"/>
                 </a:solidFill>
                 <a:latin typeface="Malgun Gothic"/>
               </a:rPr>
@@ -4439,7 +4439,7 @@
             <a:r>
               <a:rPr sz="1300" b="1">
                 <a:solidFill>
-                  <a:srgbClr val="1C2430"/>
+                  <a:srgbClr val="0F1A2E"/>
                 </a:solidFill>
                 <a:latin typeface="Malgun Gothic"/>
               </a:rPr>
@@ -4463,7 +4463,7 @@
             <a:avLst/>
           </a:prstGeom>
           <a:solidFill>
-            <a:srgbClr val="F7F9FC"/>
+            <a:srgbClr val="F5F8FC"/>
           </a:solidFill>
           <a:ln w="9525">
             <a:solidFill>
@@ -4520,7 +4520,7 @@
             <a:r>
               <a:rPr sz="1050" b="0">
                 <a:solidFill>
-                  <a:srgbClr val="6B7684"/>
+                  <a:srgbClr val="3A4657"/>
                 </a:solidFill>
                 <a:latin typeface="Malgun Gothic"/>
               </a:rPr>
@@ -4555,7 +4555,7 @@
             <a:r>
               <a:rPr sz="1300" b="1">
                 <a:solidFill>
-                  <a:srgbClr val="1C2430"/>
+                  <a:srgbClr val="0F1A2E"/>
                 </a:solidFill>
                 <a:latin typeface="Malgun Gothic"/>
               </a:rPr>
@@ -4579,7 +4579,7 @@
             <a:avLst/>
           </a:prstGeom>
           <a:solidFill>
-            <a:srgbClr val="F7F9FC"/>
+            <a:srgbClr val="F5F8FC"/>
           </a:solidFill>
           <a:ln w="9525">
             <a:solidFill>
@@ -4636,7 +4636,7 @@
             <a:r>
               <a:rPr sz="1050" b="0">
                 <a:solidFill>
-                  <a:srgbClr val="6B7684"/>
+                  <a:srgbClr val="3A4657"/>
                 </a:solidFill>
                 <a:latin typeface="Malgun Gothic"/>
               </a:rPr>
@@ -4671,7 +4671,7 @@
             <a:r>
               <a:rPr sz="1300" b="1">
                 <a:solidFill>
-                  <a:srgbClr val="1C2430"/>
+                  <a:srgbClr val="0F1A2E"/>
                 </a:solidFill>
                 <a:latin typeface="Malgun Gothic"/>
               </a:rPr>
@@ -4695,7 +4695,7 @@
             <a:avLst/>
           </a:prstGeom>
           <a:solidFill>
-            <a:srgbClr val="F7F9FC"/>
+            <a:srgbClr val="F5F8FC"/>
           </a:solidFill>
           <a:ln w="9525">
             <a:solidFill>
@@ -4752,7 +4752,7 @@
             <a:r>
               <a:rPr sz="1050" b="0">
                 <a:solidFill>
-                  <a:srgbClr val="6B7684"/>
+                  <a:srgbClr val="3A4657"/>
                 </a:solidFill>
                 <a:latin typeface="Malgun Gothic"/>
               </a:rPr>
@@ -4787,7 +4787,7 @@
             <a:r>
               <a:rPr sz="1300" b="1">
                 <a:solidFill>
-                  <a:srgbClr val="1C2430"/>
+                  <a:srgbClr val="0F1A2E"/>
                 </a:solidFill>
                 <a:latin typeface="Malgun Gothic"/>
               </a:rPr>
@@ -4811,7 +4811,7 @@
             <a:avLst/>
           </a:prstGeom>
           <a:solidFill>
-            <a:srgbClr val="E6EAEF"/>
+            <a:srgbClr val="E3E8F0"/>
           </a:solidFill>
           <a:ln>
             <a:noFill/>
@@ -4998,7 +4998,7 @@
             <a:r>
               <a:rPr sz="1300" b="1">
                 <a:solidFill>
-                  <a:srgbClr val="1C2430"/>
+                  <a:srgbClr val="0F1A2E"/>
                 </a:solidFill>
                 <a:latin typeface="Malgun Gothic"/>
               </a:rPr>
@@ -5007,7 +5007,7 @@
             <a:r>
               <a:rPr sz="950" b="0">
                 <a:solidFill>
-                  <a:srgbClr val="6B7684"/>
+                  <a:srgbClr val="3A4657"/>
                 </a:solidFill>
                 <a:latin typeface="Malgun Gothic"/>
               </a:rPr>
@@ -5042,7 +5042,7 @@
             <a:r>
               <a:rPr sz="950" b="0">
                 <a:solidFill>
-                  <a:srgbClr val="6B7684"/>
+                  <a:srgbClr val="3A4657"/>
                 </a:solidFill>
                 <a:latin typeface="Malgun Gothic"/>
               </a:rPr>
@@ -5066,7 +5066,7 @@
             <a:avLst/>
           </a:prstGeom>
           <a:solidFill>
-            <a:srgbClr val="E6EAEF"/>
+            <a:srgbClr val="E3E8F0"/>
           </a:solidFill>
           <a:ln>
             <a:noFill/>
@@ -5121,7 +5121,7 @@
             <a:r>
               <a:rPr sz="1200" b="1">
                 <a:solidFill>
-                  <a:srgbClr val="1A4FC0"/>
+                  <a:srgbClr val="1E5AF0"/>
                 </a:solidFill>
                 <a:latin typeface="Malgun Gothic"/>
               </a:rPr>
@@ -5156,7 +5156,7 @@
             <a:r>
               <a:rPr sz="2200" b="1">
                 <a:solidFill>
-                  <a:srgbClr val="1C2430"/>
+                  <a:srgbClr val="0F1A2E"/>
                 </a:solidFill>
                 <a:latin typeface="Malgun Gothic"/>
               </a:rPr>
@@ -5184,7 +5184,7 @@
           </a:solidFill>
           <a:ln w="9525">
             <a:solidFill>
-              <a:srgbClr val="E6EAEF"/>
+              <a:srgbClr val="E3E8F0"/>
             </a:solidFill>
           </a:ln>
           <a:effectLst/>
@@ -5351,7 +5351,7 @@
             <a:r>
               <a:rPr sz="1250" b="0">
                 <a:solidFill>
-                  <a:srgbClr val="1C2430"/>
+                  <a:srgbClr val="0F1A2E"/>
                 </a:solidFill>
                 <a:latin typeface="Malgun Gothic"/>
               </a:rPr>
@@ -5386,7 +5386,7 @@
             <a:r>
               <a:rPr sz="1200" b="1">
                 <a:solidFill>
-                  <a:srgbClr val="1C2430"/>
+                  <a:srgbClr val="0F1A2E"/>
                 </a:solidFill>
                 <a:latin typeface="Malgun Gothic"/>
               </a:rPr>
@@ -5410,7 +5410,7 @@
             <a:avLst/>
           </a:prstGeom>
           <a:solidFill>
-            <a:srgbClr val="E6EAEF"/>
+            <a:srgbClr val="E3E8F0"/>
           </a:solidFill>
           <a:ln>
             <a:noFill/>
@@ -5544,7 +5544,7 @@
             <a:r>
               <a:rPr sz="1250" b="0">
                 <a:solidFill>
-                  <a:srgbClr val="1C2430"/>
+                  <a:srgbClr val="0F1A2E"/>
                 </a:solidFill>
                 <a:latin typeface="Malgun Gothic"/>
               </a:rPr>
@@ -5579,7 +5579,7 @@
             <a:r>
               <a:rPr sz="1200" b="1">
                 <a:solidFill>
-                  <a:srgbClr val="1C2430"/>
+                  <a:srgbClr val="0F1A2E"/>
                 </a:solidFill>
                 <a:latin typeface="Malgun Gothic"/>
               </a:rPr>
@@ -5603,7 +5603,7 @@
             <a:avLst/>
           </a:prstGeom>
           <a:solidFill>
-            <a:srgbClr val="E6EAEF"/>
+            <a:srgbClr val="E3E8F0"/>
           </a:solidFill>
           <a:ln>
             <a:noFill/>
@@ -5737,7 +5737,7 @@
             <a:r>
               <a:rPr sz="1250" b="0">
                 <a:solidFill>
-                  <a:srgbClr val="1C2430"/>
+                  <a:srgbClr val="0F1A2E"/>
                 </a:solidFill>
                 <a:latin typeface="Malgun Gothic"/>
               </a:rPr>
@@ -5772,7 +5772,7 @@
             <a:r>
               <a:rPr sz="1200" b="1">
                 <a:solidFill>
-                  <a:srgbClr val="1C2430"/>
+                  <a:srgbClr val="0F1A2E"/>
                 </a:solidFill>
                 <a:latin typeface="Malgun Gothic"/>
               </a:rPr>
@@ -5796,7 +5796,7 @@
             <a:avLst/>
           </a:prstGeom>
           <a:solidFill>
-            <a:srgbClr val="E6EAEF"/>
+            <a:srgbClr val="E3E8F0"/>
           </a:solidFill>
           <a:ln>
             <a:noFill/>
@@ -5840,7 +5840,7 @@
             <a:avLst/>
           </a:prstGeom>
           <a:solidFill>
-            <a:srgbClr val="6B7684"/>
+            <a:srgbClr val="3A4657"/>
           </a:solidFill>
           <a:ln>
             <a:noFill/>
@@ -5930,7 +5930,7 @@
             <a:r>
               <a:rPr sz="1250" b="0">
                 <a:solidFill>
-                  <a:srgbClr val="1C2430"/>
+                  <a:srgbClr val="0F1A2E"/>
                 </a:solidFill>
                 <a:latin typeface="Malgun Gothic"/>
               </a:rPr>
@@ -5965,7 +5965,7 @@
             <a:r>
               <a:rPr sz="1200" b="1">
                 <a:solidFill>
-                  <a:srgbClr val="1C2430"/>
+                  <a:srgbClr val="0F1A2E"/>
                 </a:solidFill>
                 <a:latin typeface="Malgun Gothic"/>
               </a:rPr>
@@ -5989,7 +5989,7 @@
             <a:avLst/>
           </a:prstGeom>
           <a:solidFill>
-            <a:srgbClr val="E6EAEF"/>
+            <a:srgbClr val="E3E8F0"/>
           </a:solidFill>
           <a:ln>
             <a:noFill/>
@@ -6033,7 +6033,7 @@
             <a:avLst/>
           </a:prstGeom>
           <a:solidFill>
-            <a:srgbClr val="6B7684"/>
+            <a:srgbClr val="3A4657"/>
           </a:solidFill>
           <a:ln>
             <a:noFill/>
@@ -6123,7 +6123,7 @@
             <a:r>
               <a:rPr sz="1250" b="0">
                 <a:solidFill>
-                  <a:srgbClr val="1C2430"/>
+                  <a:srgbClr val="0F1A2E"/>
                 </a:solidFill>
                 <a:latin typeface="Malgun Gothic"/>
               </a:rPr>
@@ -6158,7 +6158,7 @@
             <a:r>
               <a:rPr sz="1200" b="1">
                 <a:solidFill>
-                  <a:srgbClr val="1C2430"/>
+                  <a:srgbClr val="0F1A2E"/>
                 </a:solidFill>
                 <a:latin typeface="Malgun Gothic"/>
               </a:rPr>
@@ -6182,7 +6182,7 @@
             <a:avLst/>
           </a:prstGeom>
           <a:solidFill>
-            <a:srgbClr val="E6EAEF"/>
+            <a:srgbClr val="E3E8F0"/>
           </a:solidFill>
           <a:ln>
             <a:noFill/>
@@ -6226,7 +6226,7 @@
             <a:avLst/>
           </a:prstGeom>
           <a:solidFill>
-            <a:srgbClr val="E6EAEF"/>
+            <a:srgbClr val="E3E8F0"/>
           </a:solidFill>
           <a:ln>
             <a:noFill/>
@@ -6413,7 +6413,7 @@
             <a:r>
               <a:rPr sz="1300" b="1">
                 <a:solidFill>
-                  <a:srgbClr val="1C2430"/>
+                  <a:srgbClr val="0F1A2E"/>
                 </a:solidFill>
                 <a:latin typeface="Malgun Gothic"/>
               </a:rPr>
@@ -6422,7 +6422,7 @@
             <a:r>
               <a:rPr sz="950" b="0">
                 <a:solidFill>
-                  <a:srgbClr val="6B7684"/>
+                  <a:srgbClr val="3A4657"/>
                 </a:solidFill>
                 <a:latin typeface="Malgun Gothic"/>
               </a:rPr>
@@ -6457,7 +6457,7 @@
             <a:r>
               <a:rPr sz="950" b="0">
                 <a:solidFill>
-                  <a:srgbClr val="6B7684"/>
+                  <a:srgbClr val="3A4657"/>
                 </a:solidFill>
                 <a:latin typeface="Malgun Gothic"/>
               </a:rPr>
@@ -6481,7 +6481,7 @@
             <a:avLst/>
           </a:prstGeom>
           <a:solidFill>
-            <a:srgbClr val="E6EAEF"/>
+            <a:srgbClr val="E3E8F0"/>
           </a:solidFill>
           <a:ln>
             <a:noFill/>
@@ -6536,7 +6536,7 @@
             <a:r>
               <a:rPr sz="1200" b="1">
                 <a:solidFill>
-                  <a:srgbClr val="1A4FC0"/>
+                  <a:srgbClr val="1E5AF0"/>
                 </a:solidFill>
                 <a:latin typeface="Malgun Gothic"/>
               </a:rPr>
@@ -6571,7 +6571,7 @@
             <a:r>
               <a:rPr sz="2200" b="1">
                 <a:solidFill>
-                  <a:srgbClr val="1C2430"/>
+                  <a:srgbClr val="0F1A2E"/>
                 </a:solidFill>
                 <a:latin typeface="Malgun Gothic"/>
               </a:rPr>
@@ -6599,7 +6599,7 @@
           </a:solidFill>
           <a:ln w="9525">
             <a:solidFill>
-              <a:srgbClr val="E6EAEF"/>
+              <a:srgbClr val="E3E8F0"/>
             </a:solidFill>
           </a:ln>
           <a:effectLst/>
@@ -6676,7 +6676,7 @@
             <a:avLst/>
           </a:prstGeom>
           <a:solidFill>
-            <a:srgbClr val="E6EAEF"/>
+            <a:srgbClr val="E3E8F0"/>
           </a:solidFill>
           <a:ln>
             <a:noFill/>
@@ -6863,7 +6863,7 @@
             <a:r>
               <a:rPr sz="1300" b="1">
                 <a:solidFill>
-                  <a:srgbClr val="1C2430"/>
+                  <a:srgbClr val="0F1A2E"/>
                 </a:solidFill>
                 <a:latin typeface="Malgun Gothic"/>
               </a:rPr>
@@ -6872,7 +6872,7 @@
             <a:r>
               <a:rPr sz="950" b="0">
                 <a:solidFill>
-                  <a:srgbClr val="6B7684"/>
+                  <a:srgbClr val="3A4657"/>
                 </a:solidFill>
                 <a:latin typeface="Malgun Gothic"/>
               </a:rPr>
@@ -6907,7 +6907,7 @@
             <a:r>
               <a:rPr sz="950" b="0">
                 <a:solidFill>
-                  <a:srgbClr val="6B7684"/>
+                  <a:srgbClr val="3A4657"/>
                 </a:solidFill>
                 <a:latin typeface="Malgun Gothic"/>
               </a:rPr>
@@ -6931,7 +6931,7 @@
             <a:avLst/>
           </a:prstGeom>
           <a:solidFill>
-            <a:srgbClr val="E6EAEF"/>
+            <a:srgbClr val="E3E8F0"/>
           </a:solidFill>
           <a:ln>
             <a:noFill/>
@@ -6986,7 +6986,7 @@
             <a:r>
               <a:rPr sz="1200" b="1">
                 <a:solidFill>
-                  <a:srgbClr val="1A4FC0"/>
+                  <a:srgbClr val="1E5AF0"/>
                 </a:solidFill>
                 <a:latin typeface="Malgun Gothic"/>
               </a:rPr>
@@ -7021,7 +7021,7 @@
             <a:r>
               <a:rPr sz="2200" b="1">
                 <a:solidFill>
-                  <a:srgbClr val="1C2430"/>
+                  <a:srgbClr val="0F1A2E"/>
                 </a:solidFill>
                 <a:latin typeface="Malgun Gothic"/>
               </a:rPr>
@@ -7067,7 +7067,7 @@
                       <a:r>
                         <a:rPr sz="1200" b="1">
                           <a:solidFill>
-                            <a:srgbClr val="6B7684"/>
+                            <a:srgbClr val="3A4657"/>
                           </a:solidFill>
                           <a:latin typeface="Malgun Gothic"/>
                         </a:rPr>
@@ -7090,7 +7090,7 @@
                       <a:r>
                         <a:rPr sz="1200" b="1">
                           <a:solidFill>
-                            <a:srgbClr val="6B7684"/>
+                            <a:srgbClr val="3A4657"/>
                           </a:solidFill>
                           <a:latin typeface="Malgun Gothic"/>
                         </a:rPr>
@@ -7113,7 +7113,7 @@
                       <a:r>
                         <a:rPr sz="1200" b="1">
                           <a:solidFill>
-                            <a:srgbClr val="6B7684"/>
+                            <a:srgbClr val="3A4657"/>
                           </a:solidFill>
                           <a:latin typeface="Malgun Gothic"/>
                         </a:rPr>
@@ -7136,7 +7136,7 @@
                       <a:r>
                         <a:rPr sz="1200" b="1">
                           <a:solidFill>
-                            <a:srgbClr val="6B7684"/>
+                            <a:srgbClr val="3A4657"/>
                           </a:solidFill>
                           <a:latin typeface="Malgun Gothic"/>
                         </a:rPr>
@@ -7159,7 +7159,7 @@
                       <a:r>
                         <a:rPr sz="1200" b="1">
                           <a:solidFill>
-                            <a:srgbClr val="6B7684"/>
+                            <a:srgbClr val="3A4657"/>
                           </a:solidFill>
                           <a:latin typeface="Malgun Gothic"/>
                         </a:rPr>
@@ -7182,7 +7182,7 @@
                       <a:r>
                         <a:rPr sz="1200" b="1">
                           <a:solidFill>
-                            <a:srgbClr val="6B7684"/>
+                            <a:srgbClr val="3A4657"/>
                           </a:solidFill>
                           <a:latin typeface="Malgun Gothic"/>
                         </a:rPr>
@@ -7205,7 +7205,7 @@
                       <a:r>
                         <a:rPr sz="1200" b="1">
                           <a:solidFill>
-                            <a:srgbClr val="6B7684"/>
+                            <a:srgbClr val="3A4657"/>
                           </a:solidFill>
                           <a:latin typeface="Malgun Gothic"/>
                         </a:rPr>
@@ -7230,7 +7230,7 @@
                       <a:r>
                         <a:rPr sz="1200" b="1">
                           <a:solidFill>
-                            <a:srgbClr val="1C2430"/>
+                            <a:srgbClr val="0F1A2E"/>
                           </a:solidFill>
                           <a:latin typeface="Malgun Gothic"/>
                         </a:rPr>
@@ -7253,7 +7253,7 @@
                       <a:r>
                         <a:rPr sz="1200" b="0">
                           <a:solidFill>
-                            <a:srgbClr val="1C2430"/>
+                            <a:srgbClr val="0F1A2E"/>
                           </a:solidFill>
                           <a:latin typeface="Malgun Gothic"/>
                         </a:rPr>
@@ -7276,7 +7276,7 @@
                       <a:r>
                         <a:rPr sz="1200" b="0">
                           <a:solidFill>
-                            <a:srgbClr val="1C2430"/>
+                            <a:srgbClr val="0F1A2E"/>
                           </a:solidFill>
                           <a:latin typeface="Malgun Gothic"/>
                         </a:rPr>
@@ -7299,7 +7299,7 @@
                       <a:r>
                         <a:rPr sz="1200" b="0">
                           <a:solidFill>
-                            <a:srgbClr val="1C2430"/>
+                            <a:srgbClr val="0F1A2E"/>
                           </a:solidFill>
                           <a:latin typeface="Malgun Gothic"/>
                         </a:rPr>
@@ -7322,7 +7322,7 @@
                       <a:r>
                         <a:rPr sz="1200" b="0">
                           <a:solidFill>
-                            <a:srgbClr val="1C2430"/>
+                            <a:srgbClr val="0F1A2E"/>
                           </a:solidFill>
                           <a:latin typeface="Malgun Gothic"/>
                         </a:rPr>
@@ -7345,7 +7345,7 @@
                       <a:r>
                         <a:rPr sz="1200" b="0">
                           <a:solidFill>
-                            <a:srgbClr val="1C2430"/>
+                            <a:srgbClr val="0F1A2E"/>
                           </a:solidFill>
                           <a:latin typeface="Malgun Gothic"/>
                         </a:rPr>
@@ -7368,7 +7368,7 @@
                       <a:r>
                         <a:rPr sz="1200" b="0">
                           <a:solidFill>
-                            <a:srgbClr val="2A7D46"/>
+                            <a:srgbClr val="12805C"/>
                           </a:solidFill>
                           <a:latin typeface="Malgun Gothic"/>
                         </a:rPr>
@@ -7393,7 +7393,7 @@
                       <a:r>
                         <a:rPr sz="1200" b="1">
                           <a:solidFill>
-                            <a:srgbClr val="1C2430"/>
+                            <a:srgbClr val="0F1A2E"/>
                           </a:solidFill>
                           <a:latin typeface="Malgun Gothic"/>
                         </a:rPr>
@@ -7416,7 +7416,7 @@
                       <a:r>
                         <a:rPr sz="1200" b="0">
                           <a:solidFill>
-                            <a:srgbClr val="1C2430"/>
+                            <a:srgbClr val="0F1A2E"/>
                           </a:solidFill>
                           <a:latin typeface="Malgun Gothic"/>
                         </a:rPr>
@@ -7439,7 +7439,7 @@
                       <a:r>
                         <a:rPr sz="1200" b="0">
                           <a:solidFill>
-                            <a:srgbClr val="1C2430"/>
+                            <a:srgbClr val="0F1A2E"/>
                           </a:solidFill>
                           <a:latin typeface="Malgun Gothic"/>
                         </a:rPr>
@@ -7462,7 +7462,7 @@
                       <a:r>
                         <a:rPr sz="1200" b="0">
                           <a:solidFill>
-                            <a:srgbClr val="1C2430"/>
+                            <a:srgbClr val="0F1A2E"/>
                           </a:solidFill>
                           <a:latin typeface="Malgun Gothic"/>
                         </a:rPr>
@@ -7485,7 +7485,7 @@
                       <a:r>
                         <a:rPr sz="1200" b="0">
                           <a:solidFill>
-                            <a:srgbClr val="1C2430"/>
+                            <a:srgbClr val="0F1A2E"/>
                           </a:solidFill>
                           <a:latin typeface="Malgun Gothic"/>
                         </a:rPr>
@@ -7508,7 +7508,7 @@
                       <a:r>
                         <a:rPr sz="1200" b="0">
                           <a:solidFill>
-                            <a:srgbClr val="1C2430"/>
+                            <a:srgbClr val="0F1A2E"/>
                           </a:solidFill>
                           <a:latin typeface="Malgun Gothic"/>
                         </a:rPr>
@@ -7531,7 +7531,7 @@
                       <a:r>
                         <a:rPr sz="1200" b="0">
                           <a:solidFill>
-                            <a:srgbClr val="2A7D46"/>
+                            <a:srgbClr val="12805C"/>
                           </a:solidFill>
                           <a:latin typeface="Malgun Gothic"/>
                         </a:rPr>
@@ -7556,7 +7556,7 @@
                       <a:r>
                         <a:rPr sz="1200" b="1">
                           <a:solidFill>
-                            <a:srgbClr val="1C2430"/>
+                            <a:srgbClr val="0F1A2E"/>
                           </a:solidFill>
                           <a:latin typeface="Malgun Gothic"/>
                         </a:rPr>
@@ -7579,7 +7579,7 @@
                       <a:r>
                         <a:rPr sz="1200" b="0">
                           <a:solidFill>
-                            <a:srgbClr val="1C2430"/>
+                            <a:srgbClr val="0F1A2E"/>
                           </a:solidFill>
                           <a:latin typeface="Malgun Gothic"/>
                         </a:rPr>
@@ -7602,7 +7602,7 @@
                       <a:r>
                         <a:rPr sz="1200" b="0">
                           <a:solidFill>
-                            <a:srgbClr val="1C2430"/>
+                            <a:srgbClr val="0F1A2E"/>
                           </a:solidFill>
                           <a:latin typeface="Malgun Gothic"/>
                         </a:rPr>
@@ -7625,7 +7625,7 @@
                       <a:r>
                         <a:rPr sz="1200" b="0">
                           <a:solidFill>
-                            <a:srgbClr val="1C2430"/>
+                            <a:srgbClr val="0F1A2E"/>
                           </a:solidFill>
                           <a:latin typeface="Malgun Gothic"/>
                         </a:rPr>
@@ -7648,7 +7648,7 @@
                       <a:r>
                         <a:rPr sz="1200" b="0">
                           <a:solidFill>
-                            <a:srgbClr val="1C2430"/>
+                            <a:srgbClr val="0F1A2E"/>
                           </a:solidFill>
                           <a:latin typeface="Malgun Gothic"/>
                         </a:rPr>
@@ -7671,7 +7671,7 @@
                       <a:r>
                         <a:rPr sz="1200" b="0">
                           <a:solidFill>
-                            <a:srgbClr val="1C2430"/>
+                            <a:srgbClr val="0F1A2E"/>
                           </a:solidFill>
                           <a:latin typeface="Malgun Gothic"/>
                         </a:rPr>
@@ -7694,7 +7694,7 @@
                       <a:r>
                         <a:rPr sz="1200" b="0">
                           <a:solidFill>
-                            <a:srgbClr val="2A7D46"/>
+                            <a:srgbClr val="12805C"/>
                           </a:solidFill>
                           <a:latin typeface="Malgun Gothic"/>
                         </a:rPr>
@@ -7719,7 +7719,7 @@
                       <a:r>
                         <a:rPr sz="1200" b="1">
                           <a:solidFill>
-                            <a:srgbClr val="1C2430"/>
+                            <a:srgbClr val="0F1A2E"/>
                           </a:solidFill>
                           <a:latin typeface="Malgun Gothic"/>
                         </a:rPr>
@@ -7742,7 +7742,7 @@
                       <a:r>
                         <a:rPr sz="1200" b="0">
                           <a:solidFill>
-                            <a:srgbClr val="1C2430"/>
+                            <a:srgbClr val="0F1A2E"/>
                           </a:solidFill>
                           <a:latin typeface="Malgun Gothic"/>
                         </a:rPr>
@@ -7765,7 +7765,7 @@
                       <a:r>
                         <a:rPr sz="1200" b="0">
                           <a:solidFill>
-                            <a:srgbClr val="1C2430"/>
+                            <a:srgbClr val="0F1A2E"/>
                           </a:solidFill>
                           <a:latin typeface="Malgun Gothic"/>
                         </a:rPr>
@@ -7788,11 +7788,11 @@
                       <a:r>
                         <a:rPr sz="1200" b="0">
                           <a:solidFill>
-                            <a:srgbClr val="1C2430"/>
+                            <a:srgbClr val="0F1A2E"/>
                           </a:solidFill>
                           <a:latin typeface="Malgun Gothic"/>
                         </a:rPr>
-                        <a:t>1억</a:t>
+                        <a:t>0</a:t>
                       </a:r>
                     </a:p>
                   </a:txBody>
@@ -7811,11 +7811,11 @@
                       <a:r>
                         <a:rPr sz="1200" b="0">
                           <a:solidFill>
-                            <a:srgbClr val="1C2430"/>
+                            <a:srgbClr val="0F1A2E"/>
                           </a:solidFill>
                           <a:latin typeface="Malgun Gothic"/>
                         </a:rPr>
-                        <a:t>400만</a:t>
+                        <a:t>0</a:t>
                       </a:r>
                     </a:p>
                   </a:txBody>
@@ -7834,11 +7834,11 @@
                       <a:r>
                         <a:rPr sz="1200" b="0">
                           <a:solidFill>
-                            <a:srgbClr val="1C2430"/>
+                            <a:srgbClr val="0F1A2E"/>
                           </a:solidFill>
                           <a:latin typeface="Malgun Gothic"/>
                         </a:rPr>
-                        <a:t>60만</a:t>
+                        <a:t>0</a:t>
                       </a:r>
                     </a:p>
                   </a:txBody>
@@ -7857,7 +7857,7 @@
                       <a:r>
                         <a:rPr sz="1200" b="0">
                           <a:solidFill>
-                            <a:srgbClr val="C0392B"/>
+                            <a:srgbClr val="DC2F30"/>
                           </a:solidFill>
                           <a:latin typeface="Malgun Gothic"/>
                         </a:rPr>
@@ -7882,7 +7882,7 @@
                       <a:r>
                         <a:rPr sz="1200" b="1">
                           <a:solidFill>
-                            <a:srgbClr val="1C2430"/>
+                            <a:srgbClr val="0F1A2E"/>
                           </a:solidFill>
                           <a:latin typeface="Malgun Gothic"/>
                         </a:rPr>
@@ -7892,7 +7892,7 @@
                   </a:txBody>
                   <a:tcPr>
                     <a:solidFill>
-                      <a:srgbClr val="F7F9FC"/>
+                      <a:srgbClr val="F5F8FC"/>
                     </a:solidFill>
                   </a:tcPr>
                 </a:tc>
@@ -7905,7 +7905,7 @@
                       <a:r>
                         <a:rPr sz="1200" b="1">
                           <a:solidFill>
-                            <a:srgbClr val="1C2430"/>
+                            <a:srgbClr val="0F1A2E"/>
                           </a:solidFill>
                           <a:latin typeface="Malgun Gothic"/>
                         </a:rPr>
@@ -7915,7 +7915,7 @@
                   </a:txBody>
                   <a:tcPr>
                     <a:solidFill>
-                      <a:srgbClr val="F7F9FC"/>
+                      <a:srgbClr val="F5F8FC"/>
                     </a:solidFill>
                   </a:tcPr>
                 </a:tc>
@@ -7928,7 +7928,7 @@
                       <a:r>
                         <a:rPr sz="1200" b="1">
                           <a:solidFill>
-                            <a:srgbClr val="1C2430"/>
+                            <a:srgbClr val="0F1A2E"/>
                           </a:solidFill>
                           <a:latin typeface="Malgun Gothic"/>
                         </a:rPr>
@@ -7938,7 +7938,7 @@
                   </a:txBody>
                   <a:tcPr>
                     <a:solidFill>
-                      <a:srgbClr val="F7F9FC"/>
+                      <a:srgbClr val="F5F8FC"/>
                     </a:solidFill>
                   </a:tcPr>
                 </a:tc>
@@ -7951,17 +7951,17 @@
                       <a:r>
                         <a:rPr sz="1200" b="1">
                           <a:solidFill>
-                            <a:srgbClr val="1C2430"/>
+                            <a:srgbClr val="0F1A2E"/>
                           </a:solidFill>
                           <a:latin typeface="Malgun Gothic"/>
                         </a:rPr>
-                        <a:t>8억</a:t>
+                        <a:t>7억</a:t>
                       </a:r>
                     </a:p>
                   </a:txBody>
                   <a:tcPr>
                     <a:solidFill>
-                      <a:srgbClr val="F7F9FC"/>
+                      <a:srgbClr val="F5F8FC"/>
                     </a:solidFill>
                   </a:tcPr>
                 </a:tc>
@@ -7974,7 +7974,7 @@
                       <a:r>
                         <a:rPr sz="1200" b="1">
                           <a:solidFill>
-                            <a:srgbClr val="1C2430"/>
+                            <a:srgbClr val="0F1A2E"/>
                           </a:solidFill>
                           <a:latin typeface="Malgun Gothic"/>
                         </a:rPr>
@@ -7984,7 +7984,7 @@
                   </a:txBody>
                   <a:tcPr>
                     <a:solidFill>
-                      <a:srgbClr val="F7F9FC"/>
+                      <a:srgbClr val="F5F8FC"/>
                     </a:solidFill>
                   </a:tcPr>
                 </a:tc>
@@ -7997,7 +7997,7 @@
                       <a:r>
                         <a:rPr sz="1200" b="1">
                           <a:solidFill>
-                            <a:srgbClr val="1C2430"/>
+                            <a:srgbClr val="0F1A2E"/>
                           </a:solidFill>
                           <a:latin typeface="Malgun Gothic"/>
                         </a:rPr>
@@ -8007,7 +8007,7 @@
                   </a:txBody>
                   <a:tcPr>
                     <a:solidFill>
-                      <a:srgbClr val="F7F9FC"/>
+                      <a:srgbClr val="F5F8FC"/>
                     </a:solidFill>
                   </a:tcPr>
                 </a:tc>
@@ -8020,7 +8020,7 @@
                       <a:r>
                         <a:rPr sz="1200" b="1">
                           <a:solidFill>
-                            <a:srgbClr val="1C2430"/>
+                            <a:srgbClr val="0F1A2E"/>
                           </a:solidFill>
                           <a:latin typeface="Malgun Gothic"/>
                         </a:rPr>
@@ -8030,7 +8030,7 @@
                   </a:txBody>
                   <a:tcPr>
                     <a:solidFill>
-                      <a:srgbClr val="F7F9FC"/>
+                      <a:srgbClr val="F5F8FC"/>
                     </a:solidFill>
                   </a:tcPr>
                 </a:tc>
@@ -8065,7 +8065,7 @@
             <a:r>
               <a:rPr sz="1100" b="0">
                 <a:solidFill>
-                  <a:srgbClr val="6B7684"/>
+                  <a:srgbClr val="3A4657"/>
                 </a:solidFill>
                 <a:latin typeface="Malgun Gothic"/>
               </a:rPr>
@@ -8089,7 +8089,7 @@
             <a:avLst/>
           </a:prstGeom>
           <a:solidFill>
-            <a:srgbClr val="E6EAEF"/>
+            <a:srgbClr val="E3E8F0"/>
           </a:solidFill>
           <a:ln>
             <a:noFill/>
@@ -8276,7 +8276,7 @@
             <a:r>
               <a:rPr sz="1300" b="1">
                 <a:solidFill>
-                  <a:srgbClr val="1C2430"/>
+                  <a:srgbClr val="0F1A2E"/>
                 </a:solidFill>
                 <a:latin typeface="Malgun Gothic"/>
               </a:rPr>
@@ -8285,7 +8285,7 @@
             <a:r>
               <a:rPr sz="950" b="0">
                 <a:solidFill>
-                  <a:srgbClr val="6B7684"/>
+                  <a:srgbClr val="3A4657"/>
                 </a:solidFill>
                 <a:latin typeface="Malgun Gothic"/>
               </a:rPr>
@@ -8320,7 +8320,7 @@
             <a:r>
               <a:rPr sz="950" b="0">
                 <a:solidFill>
-                  <a:srgbClr val="6B7684"/>
+                  <a:srgbClr val="3A4657"/>
                 </a:solidFill>
                 <a:latin typeface="Malgun Gothic"/>
               </a:rPr>
@@ -8344,7 +8344,7 @@
             <a:avLst/>
           </a:prstGeom>
           <a:solidFill>
-            <a:srgbClr val="E6EAEF"/>
+            <a:srgbClr val="E3E8F0"/>
           </a:solidFill>
           <a:ln>
             <a:noFill/>
@@ -8399,7 +8399,7 @@
             <a:r>
               <a:rPr sz="1200" b="1">
                 <a:solidFill>
-                  <a:srgbClr val="1A4FC0"/>
+                  <a:srgbClr val="1E5AF0"/>
                 </a:solidFill>
                 <a:latin typeface="Malgun Gothic"/>
               </a:rPr>
@@ -8434,7 +8434,7 @@
             <a:r>
               <a:rPr sz="2200" b="1">
                 <a:solidFill>
-                  <a:srgbClr val="1C2430"/>
+                  <a:srgbClr val="0F1A2E"/>
                 </a:solidFill>
                 <a:latin typeface="Malgun Gothic"/>
               </a:rPr>
@@ -8462,7 +8462,7 @@
           </a:solidFill>
           <a:ln w="9525">
             <a:solidFill>
-              <a:srgbClr val="E6EAEF"/>
+              <a:srgbClr val="E3E8F0"/>
             </a:solidFill>
           </a:ln>
           <a:effectLst/>
@@ -8543,7 +8543,7 @@
           </a:solidFill>
           <a:ln w="9525">
             <a:solidFill>
-              <a:srgbClr val="E6EAEF"/>
+              <a:srgbClr val="E3E8F0"/>
             </a:solidFill>
           </a:ln>
           <a:effectLst/>
@@ -8624,7 +8624,7 @@
           </a:solidFill>
           <a:ln w="9525">
             <a:solidFill>
-              <a:srgbClr val="E6EAEF"/>
+              <a:srgbClr val="E3E8F0"/>
             </a:solidFill>
           </a:ln>
           <a:effectLst/>
@@ -8701,7 +8701,7 @@
             <a:avLst/>
           </a:prstGeom>
           <a:solidFill>
-            <a:srgbClr val="E6EAEF"/>
+            <a:srgbClr val="E3E8F0"/>
           </a:solidFill>
           <a:ln>
             <a:noFill/>
@@ -8888,7 +8888,7 @@
             <a:r>
               <a:rPr sz="3000" b="1">
                 <a:solidFill>
-                  <a:srgbClr val="1C2430"/>
+                  <a:srgbClr val="0F1A2E"/>
                 </a:solidFill>
                 <a:latin typeface="Malgun Gothic"/>
               </a:rPr>
@@ -8897,7 +8897,7 @@
             <a:r>
               <a:rPr sz="3000" b="1">
                 <a:solidFill>
-                  <a:srgbClr val="1A4FC0"/>
+                  <a:srgbClr val="1E5AF0"/>
                 </a:solidFill>
                 <a:latin typeface="Malgun Gothic"/>
               </a:rPr>
@@ -8906,7 +8906,7 @@
             <a:r>
               <a:rPr sz="3000" b="1">
                 <a:solidFill>
-                  <a:srgbClr val="1C2430"/>
+                  <a:srgbClr val="0F1A2E"/>
                 </a:solidFill>
                 <a:latin typeface="Malgun Gothic"/>
               </a:rPr>
@@ -8950,7 +8950,7 @@
             <a:r>
               <a:rPr sz="1300" b="1">
                 <a:solidFill>
-                  <a:srgbClr val="1C2430"/>
+                  <a:srgbClr val="0F1A2E"/>
                 </a:solidFill>
                 <a:latin typeface="Malgun Gothic"/>
               </a:rPr>
@@ -8984,7 +8984,7 @@
             <a:avLst/>
           </a:prstGeom>
           <a:solidFill>
-            <a:srgbClr val="E6EAEF"/>
+            <a:srgbClr val="E3E8F0"/>
           </a:solidFill>
           <a:ln>
             <a:noFill/>
